--- a/rapports/septembre/Ryobi_sept2026.pptx
+++ b/rapports/septembre/Ryobi_sept2026.pptx
@@ -6235,7 +6235,7 @@
         <p:spPr>
           <a:xfrm>
             <a:off x="8296656" y="4389120"/>
-            <a:ext cx="2072640" cy="152400"/>
+            <a:ext cx="2225040" cy="152400"/>
           </a:xfrm>
           <a:prstGeom prst="rect">
             <a:avLst/>
@@ -6256,7 +6256,7 @@
                 </a:solidFill>
                 <a:latin typeface="Arial"/>
               </a:rPr>
-              <a:t>Mesure et détection</a:t>
+              <a:t>Jardin et entretien extérieur</a:t>
             </a:r>
           </a:p>
         </p:txBody>
@@ -6314,7 +6314,7 @@
         <p:spPr>
           <a:xfrm>
             <a:off x="8296656" y="4657344"/>
-            <a:ext cx="2072640" cy="152400"/>
+            <a:ext cx="2225040" cy="152400"/>
           </a:xfrm>
           <a:prstGeom prst="rect">
             <a:avLst/>
@@ -6329,13 +6329,13 @@
           <a:p>
             <a:pPr algn="l"/>
             <a:r>
-              <a:rPr sz="1000" b="0" i="0">
+              <a:rPr sz="800" b="0" i="0">
                 <a:solidFill>
                   <a:srgbClr val="111111"/>
                 </a:solidFill>
                 <a:latin typeface="Arial"/>
               </a:rPr>
-              <a:t>Outils et coffrets · 30 %</a:t>
+              <a:t>Bricolage et électroportatif · 32 %</a:t>
             </a:r>
           </a:p>
         </p:txBody>
@@ -6393,7 +6393,7 @@
         <p:spPr>
           <a:xfrm>
             <a:off x="8296656" y="4925568"/>
-            <a:ext cx="2072640" cy="152400"/>
+            <a:ext cx="2225040" cy="152400"/>
           </a:xfrm>
           <a:prstGeom prst="rect">
             <a:avLst/>
@@ -6408,13 +6408,13 @@
           <a:p>
             <a:pPr algn="l"/>
             <a:r>
-              <a:rPr sz="1000" b="0" i="0">
+              <a:rPr sz="800" b="0" i="0">
                 <a:solidFill>
                   <a:srgbClr val="111111"/>
                 </a:solidFill>
                 <a:latin typeface="Arial"/>
               </a:rPr>
-              <a:t>Électroportatif · 17 %</a:t>
+              <a:t>Nettoyage, maison et automobile · 19 %</a:t>
             </a:r>
           </a:p>
         </p:txBody>
@@ -6472,7 +6472,7 @@
         <p:spPr>
           <a:xfrm>
             <a:off x="8296656" y="5193792"/>
-            <a:ext cx="2072640" cy="152400"/>
+            <a:ext cx="2225040" cy="152400"/>
           </a:xfrm>
           <a:prstGeom prst="rect">
             <a:avLst/>
@@ -6487,13 +6487,13 @@
           <a:p>
             <a:pPr algn="l"/>
             <a:r>
-              <a:rPr sz="1000" b="0" i="0">
+              <a:rPr sz="800" b="0" i="0">
                 <a:solidFill>
                   <a:srgbClr val="111111"/>
                 </a:solidFill>
                 <a:latin typeface="Arial"/>
               </a:rPr>
-              <a:t>Autres · 13 %</a:t>
+              <a:t>Batteries, accessoires et rangement · 4 %</a:t>
             </a:r>
           </a:p>
         </p:txBody>
@@ -6507,7 +6507,7 @@
         <p:spPr>
           <a:xfrm>
             <a:off x="10564368" y="4450080"/>
-            <a:ext cx="475488" cy="536448"/>
+            <a:ext cx="475488" cy="603504"/>
           </a:xfrm>
           <a:prstGeom prst="rect">
             <a:avLst/>
@@ -6551,7 +6551,7 @@
         <p:spPr>
           <a:xfrm>
             <a:off x="10564368" y="4450080"/>
-            <a:ext cx="475488" cy="536448"/>
+            <a:ext cx="475488" cy="603504"/>
           </a:xfrm>
           <a:prstGeom prst="rect">
             <a:avLst/>
@@ -6572,7 +6572,7 @@
                 </a:solidFill>
                 <a:latin typeface="Arial"/>
               </a:rPr>
-              <a:t>40 %</a:t>
+              <a:t>45 %</a:t>
             </a:r>
           </a:p>
         </p:txBody>
@@ -6585,8 +6585,8 @@
         </p:nvSpPr>
         <p:spPr>
           <a:xfrm>
-            <a:off x="10564368" y="4986528"/>
-            <a:ext cx="475488" cy="402336"/>
+            <a:off x="10564368" y="5053584"/>
+            <a:ext cx="475488" cy="429158"/>
           </a:xfrm>
           <a:prstGeom prst="rect">
             <a:avLst/>
@@ -6629,8 +6629,8 @@
         </p:nvSpPr>
         <p:spPr>
           <a:xfrm>
-            <a:off x="10564368" y="4986528"/>
-            <a:ext cx="475488" cy="402336"/>
+            <a:off x="10564368" y="5053584"/>
+            <a:ext cx="475488" cy="429158"/>
           </a:xfrm>
           <a:prstGeom prst="rect">
             <a:avLst/>
@@ -6651,7 +6651,7 @@
                 </a:solidFill>
                 <a:latin typeface="Arial"/>
               </a:rPr>
-              <a:t>30 %</a:t>
+              <a:t>32 %</a:t>
             </a:r>
           </a:p>
         </p:txBody>
@@ -6664,8 +6664,8 @@
         </p:nvSpPr>
         <p:spPr>
           <a:xfrm>
-            <a:off x="10564368" y="5388864"/>
-            <a:ext cx="475488" cy="227990"/>
+            <a:off x="10564368" y="5482742"/>
+            <a:ext cx="475488" cy="254812"/>
           </a:xfrm>
           <a:prstGeom prst="rect">
             <a:avLst/>
@@ -6708,8 +6708,8 @@
         </p:nvSpPr>
         <p:spPr>
           <a:xfrm>
-            <a:off x="10564368" y="5616854"/>
-            <a:ext cx="475488" cy="174345"/>
+            <a:off x="10564368" y="5737555"/>
+            <a:ext cx="475488" cy="53644"/>
           </a:xfrm>
           <a:prstGeom prst="rect">
             <a:avLst/>
